--- a/os/ppt/os_deadlock.pptx
+++ b/os/ppt/os_deadlock.pptx
@@ -140,7 +140,7 @@
       </p:grpSpPr>
       <p:sp>
         <p:nvSpPr>
-          <p:cNvPr id="1859507240" name="Header Placeholder 1"/>
+          <p:cNvPr id="277445423" name="Header Placeholder 1"/>
           <p:cNvSpPr>
             <a:spLocks noGrp="1"/>
           </p:cNvSpPr>
@@ -174,7 +174,7 @@
       </p:sp>
       <p:sp>
         <p:nvSpPr>
-          <p:cNvPr id="1933800259" name="Date Placeholder 2"/>
+          <p:cNvPr id="433137859" name="Date Placeholder 2"/>
           <p:cNvSpPr>
             <a:spLocks noGrp="1"/>
           </p:cNvSpPr>
@@ -212,7 +212,7 @@
       </p:sp>
       <p:sp>
         <p:nvSpPr>
-          <p:cNvPr id="145030684" name="Slide Image Placeholder 3"/>
+          <p:cNvPr id="1318233915" name="Slide Image Placeholder 3"/>
           <p:cNvSpPr>
             <a:spLocks noChangeAspect="1" noGrp="1" noRot="1"/>
           </p:cNvSpPr>
@@ -248,7 +248,7 @@
       </p:sp>
       <p:sp>
         <p:nvSpPr>
-          <p:cNvPr id="338471898" name="Notes Placeholder 4"/>
+          <p:cNvPr id="506170840" name="Notes Placeholder 4"/>
           <p:cNvSpPr>
             <a:spLocks noGrp="1"/>
           </p:cNvSpPr>
@@ -322,7 +322,7 @@
       </p:sp>
       <p:sp>
         <p:nvSpPr>
-          <p:cNvPr id="253863949" name="Footer Placeholder 5"/>
+          <p:cNvPr id="484778046" name="Footer Placeholder 5"/>
           <p:cNvSpPr>
             <a:spLocks noGrp="1"/>
           </p:cNvSpPr>
@@ -356,7 +356,7 @@
       </p:sp>
       <p:sp>
         <p:nvSpPr>
-          <p:cNvPr id="302965428" name="Slide Number Placeholder 6"/>
+          <p:cNvPr id="1895110290" name="Slide Number Placeholder 6"/>
           <p:cNvSpPr>
             <a:spLocks noGrp="1"/>
           </p:cNvSpPr>
@@ -509,7 +509,7 @@
       </p:grpSpPr>
       <p:sp>
         <p:nvSpPr>
-          <p:cNvPr id="1335744095" name="Slide Image Placeholder 1"/>
+          <p:cNvPr id="1679645397" name="Slide Image Placeholder 1"/>
           <p:cNvSpPr>
             <a:spLocks noChangeAspect="1" noGrp="1" noRot="1"/>
           </p:cNvSpPr>
@@ -521,7 +521,7 @@
       </p:sp>
       <p:sp>
         <p:nvSpPr>
-          <p:cNvPr id="62213648" name="Notes Placeholder 2"/>
+          <p:cNvPr id="1514549509" name="Notes Placeholder 2"/>
           <p:cNvSpPr>
             <a:spLocks noGrp="1"/>
           </p:cNvSpPr>
@@ -543,7 +543,7 @@
       </p:sp>
       <p:sp>
         <p:nvSpPr>
-          <p:cNvPr id="74022241" name="Slide Number Placeholder 3"/>
+          <p:cNvPr id="757352817" name="Slide Number Placeholder 3"/>
           <p:cNvSpPr>
             <a:spLocks noGrp="1"/>
           </p:cNvSpPr>
@@ -594,7 +594,7 @@
       </p:grpSpPr>
       <p:sp>
         <p:nvSpPr>
-          <p:cNvPr id="2" name="Slide Image Placeholder 1"/>
+          <p:cNvPr id="1924607865" name="Slide Image Placeholder 1"/>
           <p:cNvSpPr>
             <a:spLocks noChangeAspect="1" noGrp="1" noRot="1"/>
           </p:cNvSpPr>
@@ -606,7 +606,7 @@
       </p:sp>
       <p:sp>
         <p:nvSpPr>
-          <p:cNvPr id="3" name="Notes Placeholder 2"/>
+          <p:cNvPr id="1597500143" name="Notes Placeholder 2"/>
           <p:cNvSpPr>
             <a:spLocks noGrp="1"/>
           </p:cNvSpPr>
@@ -628,7 +628,7 @@
       </p:sp>
       <p:sp>
         <p:nvSpPr>
-          <p:cNvPr id="4" name="Slide Number Placeholder 3"/>
+          <p:cNvPr id="269631299" name="Slide Number Placeholder 3"/>
           <p:cNvSpPr>
             <a:spLocks noGrp="1"/>
           </p:cNvSpPr>
@@ -679,7 +679,7 @@
       </p:grpSpPr>
       <p:sp>
         <p:nvSpPr>
-          <p:cNvPr id="1593991255" name="Slide Image Placeholder 1"/>
+          <p:cNvPr id="1225699153" name="Slide Image Placeholder 1"/>
           <p:cNvSpPr>
             <a:spLocks noChangeAspect="1" noGrp="1" noRot="1"/>
           </p:cNvSpPr>
@@ -691,7 +691,7 @@
       </p:sp>
       <p:sp>
         <p:nvSpPr>
-          <p:cNvPr id="2133828270" name="Notes Placeholder 2"/>
+          <p:cNvPr id="637263216" name="Notes Placeholder 2"/>
           <p:cNvSpPr>
             <a:spLocks noGrp="1"/>
           </p:cNvSpPr>
@@ -713,7 +713,7 @@
       </p:sp>
       <p:sp>
         <p:nvSpPr>
-          <p:cNvPr id="828925561" name="Slide Number Placeholder 3"/>
+          <p:cNvPr id="78339383" name="Slide Number Placeholder 3"/>
           <p:cNvSpPr>
             <a:spLocks noGrp="1"/>
           </p:cNvSpPr>
@@ -764,7 +764,7 @@
       </p:grpSpPr>
       <p:sp>
         <p:nvSpPr>
-          <p:cNvPr id="1848480358" name="Slide Image Placeholder 1"/>
+          <p:cNvPr id="1883848907" name="Slide Image Placeholder 1"/>
           <p:cNvSpPr>
             <a:spLocks noChangeAspect="1" noGrp="1" noRot="1"/>
           </p:cNvSpPr>
@@ -776,7 +776,7 @@
       </p:sp>
       <p:sp>
         <p:nvSpPr>
-          <p:cNvPr id="925686420" name="Notes Placeholder 2"/>
+          <p:cNvPr id="1460520472" name="Notes Placeholder 2"/>
           <p:cNvSpPr>
             <a:spLocks noGrp="1"/>
           </p:cNvSpPr>
@@ -798,7 +798,7 @@
       </p:sp>
       <p:sp>
         <p:nvSpPr>
-          <p:cNvPr id="795969195" name="Slide Number Placeholder 3"/>
+          <p:cNvPr id="226548734" name="Slide Number Placeholder 3"/>
           <p:cNvSpPr>
             <a:spLocks noGrp="1"/>
           </p:cNvSpPr>
@@ -849,7 +849,7 @@
       </p:grpSpPr>
       <p:sp>
         <p:nvSpPr>
-          <p:cNvPr id="1231554402" name="Slide Image Placeholder 1"/>
+          <p:cNvPr id="595767972" name="Slide Image Placeholder 1"/>
           <p:cNvSpPr>
             <a:spLocks noChangeAspect="1" noGrp="1" noRot="1"/>
           </p:cNvSpPr>
@@ -861,7 +861,7 @@
       </p:sp>
       <p:sp>
         <p:nvSpPr>
-          <p:cNvPr id="1653290783" name="Notes Placeholder 2"/>
+          <p:cNvPr id="320258813" name="Notes Placeholder 2"/>
           <p:cNvSpPr>
             <a:spLocks noGrp="1"/>
           </p:cNvSpPr>
@@ -883,7 +883,7 @@
       </p:sp>
       <p:sp>
         <p:nvSpPr>
-          <p:cNvPr id="797190746" name="Slide Number Placeholder 3"/>
+          <p:cNvPr id="1559064722" name="Slide Number Placeholder 3"/>
           <p:cNvSpPr>
             <a:spLocks noGrp="1"/>
           </p:cNvSpPr>
@@ -934,7 +934,7 @@
       </p:grpSpPr>
       <p:sp>
         <p:nvSpPr>
-          <p:cNvPr id="1169562318" name="Slide Image Placeholder 1"/>
+          <p:cNvPr id="784889948" name="Slide Image Placeholder 1"/>
           <p:cNvSpPr>
             <a:spLocks noChangeAspect="1" noGrp="1" noRot="1"/>
           </p:cNvSpPr>
@@ -946,7 +946,7 @@
       </p:sp>
       <p:sp>
         <p:nvSpPr>
-          <p:cNvPr id="1338759171" name="Notes Placeholder 2"/>
+          <p:cNvPr id="778339043" name="Notes Placeholder 2"/>
           <p:cNvSpPr>
             <a:spLocks noGrp="1"/>
           </p:cNvSpPr>
@@ -968,7 +968,7 @@
       </p:sp>
       <p:sp>
         <p:nvSpPr>
-          <p:cNvPr id="366830681" name="Slide Number Placeholder 3"/>
+          <p:cNvPr id="748643573" name="Slide Number Placeholder 3"/>
           <p:cNvSpPr>
             <a:spLocks noGrp="1"/>
           </p:cNvSpPr>
@@ -1019,7 +1019,7 @@
       </p:grpSpPr>
       <p:sp>
         <p:nvSpPr>
-          <p:cNvPr id="688237419" name="Slide Image Placeholder 1"/>
+          <p:cNvPr id="1598089534" name="Slide Image Placeholder 1"/>
           <p:cNvSpPr>
             <a:spLocks noChangeAspect="1" noGrp="1" noRot="1"/>
           </p:cNvSpPr>
@@ -1031,7 +1031,7 @@
       </p:sp>
       <p:sp>
         <p:nvSpPr>
-          <p:cNvPr id="789692830" name="Notes Placeholder 2"/>
+          <p:cNvPr id="1853281368" name="Notes Placeholder 2"/>
           <p:cNvSpPr>
             <a:spLocks noGrp="1"/>
           </p:cNvSpPr>
@@ -1053,7 +1053,7 @@
       </p:sp>
       <p:sp>
         <p:nvSpPr>
-          <p:cNvPr id="1687568665" name="Slide Number Placeholder 3"/>
+          <p:cNvPr id="1907352602" name="Slide Number Placeholder 3"/>
           <p:cNvSpPr>
             <a:spLocks noGrp="1"/>
           </p:cNvSpPr>
@@ -1104,7 +1104,7 @@
       </p:grpSpPr>
       <p:sp>
         <p:nvSpPr>
-          <p:cNvPr id="374023441" name="Slide Image Placeholder 1"/>
+          <p:cNvPr id="354985522" name="Slide Image Placeholder 1"/>
           <p:cNvSpPr>
             <a:spLocks noChangeAspect="1" noGrp="1" noRot="1"/>
           </p:cNvSpPr>
@@ -1116,7 +1116,7 @@
       </p:sp>
       <p:sp>
         <p:nvSpPr>
-          <p:cNvPr id="932307481" name="Notes Placeholder 2"/>
+          <p:cNvPr id="1434108275" name="Notes Placeholder 2"/>
           <p:cNvSpPr>
             <a:spLocks noGrp="1"/>
           </p:cNvSpPr>
@@ -1138,7 +1138,7 @@
       </p:sp>
       <p:sp>
         <p:nvSpPr>
-          <p:cNvPr id="1254415194" name="Slide Number Placeholder 3"/>
+          <p:cNvPr id="28646516" name="Slide Number Placeholder 3"/>
           <p:cNvSpPr>
             <a:spLocks noGrp="1"/>
           </p:cNvSpPr>
@@ -1189,7 +1189,7 @@
       </p:grpSpPr>
       <p:sp>
         <p:nvSpPr>
-          <p:cNvPr id="2110692699" name="Slide Image Placeholder 1"/>
+          <p:cNvPr id="670461768" name="Slide Image Placeholder 1"/>
           <p:cNvSpPr>
             <a:spLocks noChangeAspect="1" noGrp="1" noRot="1"/>
           </p:cNvSpPr>
@@ -1201,7 +1201,7 @@
       </p:sp>
       <p:sp>
         <p:nvSpPr>
-          <p:cNvPr id="435299770" name="Notes Placeholder 2"/>
+          <p:cNvPr id="632374701" name="Notes Placeholder 2"/>
           <p:cNvSpPr>
             <a:spLocks noGrp="1"/>
           </p:cNvSpPr>
@@ -1223,7 +1223,7 @@
       </p:sp>
       <p:sp>
         <p:nvSpPr>
-          <p:cNvPr id="136231416" name="Slide Number Placeholder 3"/>
+          <p:cNvPr id="204127660" name="Slide Number Placeholder 3"/>
           <p:cNvSpPr>
             <a:spLocks noGrp="1"/>
           </p:cNvSpPr>
@@ -1274,7 +1274,7 @@
       </p:grpSpPr>
       <p:sp>
         <p:nvSpPr>
-          <p:cNvPr id="86178987" name="Slide Image Placeholder 1"/>
+          <p:cNvPr id="487743093" name="Slide Image Placeholder 1"/>
           <p:cNvSpPr>
             <a:spLocks noChangeAspect="1" noGrp="1" noRot="1"/>
           </p:cNvSpPr>
@@ -1286,7 +1286,7 @@
       </p:sp>
       <p:sp>
         <p:nvSpPr>
-          <p:cNvPr id="1501811933" name="Notes Placeholder 2"/>
+          <p:cNvPr id="671660642" name="Notes Placeholder 2"/>
           <p:cNvSpPr>
             <a:spLocks noGrp="1"/>
           </p:cNvSpPr>
@@ -1308,7 +1308,7 @@
       </p:sp>
       <p:sp>
         <p:nvSpPr>
-          <p:cNvPr id="1482128683" name="Slide Number Placeholder 3"/>
+          <p:cNvPr id="1985294747" name="Slide Number Placeholder 3"/>
           <p:cNvSpPr>
             <a:spLocks noGrp="1"/>
           </p:cNvSpPr>
@@ -1673,7 +1673,7 @@
       </p:grpSpPr>
       <p:sp>
         <p:nvSpPr>
-          <p:cNvPr id="1972797868" name="Shape 0"/>
+          <p:cNvPr id="1879250512" name="Shape 0"/>
           <p:cNvSpPr/>
           <p:nvPr/>
         </p:nvSpPr>
@@ -1693,7 +1693,7 @@
       </p:sp>
       <p:sp>
         <p:nvSpPr>
-          <p:cNvPr id="468325166" name="Shape 1"/>
+          <p:cNvPr id="1605303057" name="Shape 1"/>
           <p:cNvSpPr/>
           <p:nvPr/>
         </p:nvSpPr>
@@ -1713,7 +1713,7 @@
       </p:sp>
       <p:sp>
         <p:nvSpPr>
-          <p:cNvPr id="1179218516" name="Shape 2"/>
+          <p:cNvPr id="1910076567" name="Shape 2"/>
           <p:cNvSpPr/>
           <p:nvPr/>
         </p:nvSpPr>
@@ -1738,7 +1738,7 @@
       </p:sp>
       <p:sp>
         <p:nvSpPr>
-          <p:cNvPr id="2089319754" name="Shape 3"/>
+          <p:cNvPr id="695707702" name="Shape 3"/>
           <p:cNvSpPr/>
           <p:nvPr/>
         </p:nvSpPr>
@@ -1763,7 +1763,7 @@
       </p:sp>
       <p:sp>
         <p:nvSpPr>
-          <p:cNvPr id="758118643" name="Shape 4"/>
+          <p:cNvPr id="1290835905" name="Shape 4"/>
           <p:cNvSpPr/>
           <p:nvPr/>
         </p:nvSpPr>
@@ -1788,7 +1788,7 @@
       </p:sp>
       <p:sp>
         <p:nvSpPr>
-          <p:cNvPr id="535487982" name="Shape 5"/>
+          <p:cNvPr id="2085535069" name="Shape 5"/>
           <p:cNvSpPr/>
           <p:nvPr/>
         </p:nvSpPr>
@@ -1813,7 +1813,7 @@
       </p:sp>
       <p:sp>
         <p:nvSpPr>
-          <p:cNvPr id="264435544" name="Text 6"/>
+          <p:cNvPr id="1258969554" name="Text 6"/>
           <p:cNvSpPr txBox="1"/>
           <p:nvPr/>
         </p:nvSpPr>
@@ -1853,7 +1853,7 @@
       </p:sp>
       <p:sp>
         <p:nvSpPr>
-          <p:cNvPr id="1337388690" name="Text 7"/>
+          <p:cNvPr id="262372414" name="Text 7"/>
           <p:cNvSpPr txBox="1"/>
           <p:nvPr/>
         </p:nvSpPr>
@@ -1893,7 +1893,7 @@
       </p:sp>
       <p:sp>
         <p:nvSpPr>
-          <p:cNvPr id="857990671" name="Text 8"/>
+          <p:cNvPr id="308796463" name="Text 8"/>
           <p:cNvSpPr txBox="1"/>
           <p:nvPr/>
         </p:nvSpPr>
@@ -1933,7 +1933,7 @@
       </p:sp>
       <p:sp>
         <p:nvSpPr>
-          <p:cNvPr id="201256645" name="Shape 9"/>
+          <p:cNvPr id="1835839423" name="Shape 9"/>
           <p:cNvSpPr/>
           <p:nvPr/>
         </p:nvSpPr>
@@ -1956,7 +1956,7 @@
       </p:sp>
       <p:sp>
         <p:nvSpPr>
-          <p:cNvPr id="1524098367" name="Text 10"/>
+          <p:cNvPr id="632109011" name="Text 10"/>
           <p:cNvSpPr txBox="1"/>
           <p:nvPr/>
         </p:nvSpPr>
@@ -2057,7 +2057,7 @@
       </p:grpSpPr>
       <p:pic>
         <p:nvPicPr>
-          <p:cNvPr id="174260284" name="">
+          <p:cNvPr id="2043450953" name="">
             <a:hlinkClick r:id="" action="ppaction://media"/>
           </p:cNvPr>
           <p:cNvPicPr>
@@ -2078,8 +2078,8 @@
         </p:blipFill>
         <p:spPr bwMode="auto">
           <a:xfrm flipH="0" flipV="0">
-            <a:off x="1392" y="300749"/>
-            <a:ext cx="12817928" cy="6232071"/>
+            <a:off x="303249" y="300748"/>
+            <a:ext cx="11509374" cy="6232070"/>
           </a:xfrm>
           <a:prstGeom prst="rect">
             <a:avLst/>
@@ -2128,7 +2128,7 @@
       </p:grpSpPr>
       <p:sp>
         <p:nvSpPr>
-          <p:cNvPr id="17827743" name="Text 0"/>
+          <p:cNvPr id="1959108277" name="Text 0"/>
           <p:cNvSpPr txBox="1"/>
           <p:nvPr/>
         </p:nvSpPr>
@@ -2168,7 +2168,7 @@
       </p:sp>
       <p:sp>
         <p:nvSpPr>
-          <p:cNvPr id="967823334" name="Text 1"/>
+          <p:cNvPr id="2046421588" name="Text 1"/>
           <p:cNvSpPr txBox="1"/>
           <p:nvPr/>
         </p:nvSpPr>
@@ -2211,7 +2211,7 @@
       </p:sp>
       <p:sp>
         <p:nvSpPr>
-          <p:cNvPr id="73321011" name="Shape 2"/>
+          <p:cNvPr id="1539292807" name="Shape 2"/>
           <p:cNvSpPr/>
           <p:nvPr/>
         </p:nvSpPr>
@@ -2231,7 +2231,7 @@
       </p:sp>
       <p:sp>
         <p:nvSpPr>
-          <p:cNvPr id="963890117" name="Text 3"/>
+          <p:cNvPr id="801512336" name="Text 3"/>
           <p:cNvSpPr txBox="1"/>
           <p:nvPr/>
         </p:nvSpPr>
@@ -2271,7 +2271,7 @@
       </p:sp>
       <p:sp>
         <p:nvSpPr>
-          <p:cNvPr id="826385753" name="Shape 4"/>
+          <p:cNvPr id="202115217" name="Shape 4"/>
           <p:cNvSpPr/>
           <p:nvPr/>
         </p:nvSpPr>
@@ -2291,7 +2291,7 @@
       </p:sp>
       <p:sp>
         <p:nvSpPr>
-          <p:cNvPr id="259233759" name="Text 5"/>
+          <p:cNvPr id="1174466399" name="Text 5"/>
           <p:cNvSpPr txBox="1"/>
           <p:nvPr/>
         </p:nvSpPr>
@@ -2331,7 +2331,7 @@
       </p:sp>
       <p:sp>
         <p:nvSpPr>
-          <p:cNvPr id="932572645" name="Shape 6"/>
+          <p:cNvPr id="2047484603" name="Shape 6"/>
           <p:cNvSpPr/>
           <p:nvPr/>
         </p:nvSpPr>
@@ -2351,7 +2351,7 @@
       </p:sp>
       <p:sp>
         <p:nvSpPr>
-          <p:cNvPr id="1724000585" name="Text 7"/>
+          <p:cNvPr id="253410564" name="Text 7"/>
           <p:cNvSpPr txBox="1"/>
           <p:nvPr/>
         </p:nvSpPr>
@@ -2391,7 +2391,7 @@
       </p:sp>
       <p:sp>
         <p:nvSpPr>
-          <p:cNvPr id="1686277285" name="Shape 8"/>
+          <p:cNvPr id="109102338" name="Shape 8"/>
           <p:cNvSpPr/>
           <p:nvPr/>
         </p:nvSpPr>
@@ -2411,7 +2411,7 @@
       </p:sp>
       <p:sp>
         <p:nvSpPr>
-          <p:cNvPr id="930785411" name="Text 9"/>
+          <p:cNvPr id="1149503539" name="Text 9"/>
           <p:cNvSpPr txBox="1"/>
           <p:nvPr/>
         </p:nvSpPr>
@@ -2451,7 +2451,7 @@
       </p:sp>
       <p:sp>
         <p:nvSpPr>
-          <p:cNvPr id="777345478" name="Shape 10"/>
+          <p:cNvPr id="1978967106" name="Shape 10"/>
           <p:cNvSpPr/>
           <p:nvPr/>
         </p:nvSpPr>
@@ -2478,7 +2478,7 @@
       </p:sp>
       <p:sp>
         <p:nvSpPr>
-          <p:cNvPr id="109012755" name="Text 11"/>
+          <p:cNvPr id="1069298901" name="Text 11"/>
           <p:cNvSpPr txBox="1"/>
           <p:nvPr/>
         </p:nvSpPr>
@@ -2518,7 +2518,7 @@
       </p:sp>
       <p:sp>
         <p:nvSpPr>
-          <p:cNvPr id="687615085" name="Text 12"/>
+          <p:cNvPr id="1697105809" name="Text 12"/>
           <p:cNvSpPr txBox="1"/>
           <p:nvPr/>
         </p:nvSpPr>
@@ -2561,7 +2561,7 @@
       </p:sp>
       <p:sp>
         <p:nvSpPr>
-          <p:cNvPr id="2127524362" name="Shape 13"/>
+          <p:cNvPr id="758169967" name="Shape 13"/>
           <p:cNvSpPr/>
           <p:nvPr/>
         </p:nvSpPr>
@@ -2586,7 +2586,7 @@
       </p:sp>
       <p:sp>
         <p:nvSpPr>
-          <p:cNvPr id="767875463" name="Text 14"/>
+          <p:cNvPr id="981713323" name="Text 14"/>
           <p:cNvSpPr txBox="1"/>
           <p:nvPr/>
         </p:nvSpPr>
@@ -2626,7 +2626,7 @@
       </p:sp>
       <p:sp>
         <p:nvSpPr>
-          <p:cNvPr id="1682788186" name="Shape 15"/>
+          <p:cNvPr id="2053921654" name="Shape 15"/>
           <p:cNvSpPr/>
           <p:nvPr/>
         </p:nvSpPr>
@@ -2653,7 +2653,7 @@
       </p:sp>
       <p:sp>
         <p:nvSpPr>
-          <p:cNvPr id="235420855" name="Text 16"/>
+          <p:cNvPr id="720650768" name="Text 16"/>
           <p:cNvSpPr txBox="1"/>
           <p:nvPr/>
         </p:nvSpPr>
@@ -2693,7 +2693,7 @@
       </p:sp>
       <p:sp>
         <p:nvSpPr>
-          <p:cNvPr id="1351364132" name="Shape 17"/>
+          <p:cNvPr id="519517215" name="Shape 17"/>
           <p:cNvSpPr/>
           <p:nvPr/>
         </p:nvSpPr>
@@ -2718,7 +2718,7 @@
       </p:sp>
       <p:sp>
         <p:nvSpPr>
-          <p:cNvPr id="219823048" name="Text 18"/>
+          <p:cNvPr id="1911337777" name="Text 18"/>
           <p:cNvSpPr txBox="1"/>
           <p:nvPr/>
         </p:nvSpPr>
@@ -2758,7 +2758,7 @@
       </p:sp>
       <p:sp>
         <p:nvSpPr>
-          <p:cNvPr id="1229310616" name="Shape 19"/>
+          <p:cNvPr id="1767494243" name="Shape 19"/>
           <p:cNvSpPr/>
           <p:nvPr/>
         </p:nvSpPr>
@@ -2785,7 +2785,7 @@
       </p:sp>
       <p:sp>
         <p:nvSpPr>
-          <p:cNvPr id="1903192600" name="Text 20"/>
+          <p:cNvPr id="405039991" name="Text 20"/>
           <p:cNvSpPr txBox="1"/>
           <p:nvPr/>
         </p:nvSpPr>
@@ -2825,7 +2825,7 @@
       </p:sp>
       <p:sp>
         <p:nvSpPr>
-          <p:cNvPr id="1041206053" name="Shape 21"/>
+          <p:cNvPr id="2052415595" name="Shape 21"/>
           <p:cNvSpPr/>
           <p:nvPr/>
         </p:nvSpPr>
@@ -2849,7 +2849,7 @@
       </p:sp>
       <p:sp>
         <p:nvSpPr>
-          <p:cNvPr id="560190729" name="Shape 22"/>
+          <p:cNvPr id="494388892" name="Shape 22"/>
           <p:cNvSpPr/>
           <p:nvPr/>
         </p:nvSpPr>
@@ -2873,7 +2873,7 @@
       </p:sp>
       <p:sp>
         <p:nvSpPr>
-          <p:cNvPr id="1615874967" name="Shape 23"/>
+          <p:cNvPr id="843018499" name="Shape 23"/>
           <p:cNvSpPr/>
           <p:nvPr/>
         </p:nvSpPr>
@@ -2897,7 +2897,7 @@
       </p:sp>
       <p:sp>
         <p:nvSpPr>
-          <p:cNvPr id="1778731204" name="Shape 24"/>
+          <p:cNvPr id="1840610921" name="Shape 24"/>
           <p:cNvSpPr/>
           <p:nvPr/>
         </p:nvSpPr>
@@ -2921,7 +2921,7 @@
       </p:sp>
       <p:sp>
         <p:nvSpPr>
-          <p:cNvPr id="2143617567" name="Text 25"/>
+          <p:cNvPr id="1961735031" name="Text 25"/>
           <p:cNvSpPr txBox="1"/>
           <p:nvPr/>
         </p:nvSpPr>
@@ -2961,7 +2961,7 @@
       </p:sp>
       <p:sp>
         <p:nvSpPr>
-          <p:cNvPr id="712432649" name="Shape 21"/>
+          <p:cNvPr id="1655851969" name="Shape 21"/>
           <p:cNvSpPr/>
           <p:nvPr/>
         </p:nvSpPr>
@@ -2985,7 +2985,7 @@
       </p:sp>
       <p:sp>
         <p:nvSpPr>
-          <p:cNvPr id="805167387" name=""/>
+          <p:cNvPr id="345616484" name=""/>
           <p:cNvSpPr txBox="1"/>
           <p:nvPr/>
         </p:nvSpPr>
@@ -3017,7 +3017,7 @@
       </p:sp>
       <p:sp>
         <p:nvSpPr>
-          <p:cNvPr id="816645398" name=""/>
+          <p:cNvPr id="847374126" name=""/>
           <p:cNvSpPr txBox="1"/>
           <p:nvPr/>
         </p:nvSpPr>
@@ -3049,7 +3049,7 @@
       </p:sp>
       <p:sp>
         <p:nvSpPr>
-          <p:cNvPr id="181050168" name=""/>
+          <p:cNvPr id="1130667829" name=""/>
           <p:cNvSpPr txBox="1"/>
           <p:nvPr/>
         </p:nvSpPr>
@@ -3081,7 +3081,7 @@
       </p:sp>
       <p:sp>
         <p:nvSpPr>
-          <p:cNvPr id="1695685207" name="Shape 21"/>
+          <p:cNvPr id="2034196335" name="Shape 21"/>
           <p:cNvSpPr/>
           <p:nvPr/>
         </p:nvSpPr>
@@ -3105,7 +3105,7 @@
       </p:sp>
       <p:sp>
         <p:nvSpPr>
-          <p:cNvPr id="1509789340" name=""/>
+          <p:cNvPr id="1949514405" name=""/>
           <p:cNvSpPr txBox="1"/>
           <p:nvPr/>
         </p:nvSpPr>
@@ -3181,7 +3181,7 @@
       </p:grpSpPr>
       <p:sp>
         <p:nvSpPr>
-          <p:cNvPr id="1758334022" name="Text 0"/>
+          <p:cNvPr id="1489329750" name="Text 0"/>
           <p:cNvSpPr txBox="1"/>
           <p:nvPr/>
         </p:nvSpPr>
@@ -3221,7 +3221,7 @@
       </p:sp>
       <p:sp>
         <p:nvSpPr>
-          <p:cNvPr id="446214524" name="Text 1"/>
+          <p:cNvPr id="40425316" name="Text 1"/>
           <p:cNvSpPr txBox="1"/>
           <p:nvPr/>
         </p:nvSpPr>
@@ -3261,7 +3261,7 @@
       </p:sp>
       <p:sp>
         <p:nvSpPr>
-          <p:cNvPr id="832826662" name="Shape 2"/>
+          <p:cNvPr id="1219757564" name="Shape 2"/>
           <p:cNvSpPr/>
           <p:nvPr/>
         </p:nvSpPr>
@@ -3288,7 +3288,7 @@
       </p:sp>
       <p:sp>
         <p:nvSpPr>
-          <p:cNvPr id="1234498559" name="Shape 3"/>
+          <p:cNvPr id="648158568" name="Shape 3"/>
           <p:cNvSpPr/>
           <p:nvPr/>
         </p:nvSpPr>
@@ -3308,7 +3308,7 @@
       </p:sp>
       <p:sp>
         <p:nvSpPr>
-          <p:cNvPr id="887904399" name="Text 4"/>
+          <p:cNvPr id="602738807" name="Text 4"/>
           <p:cNvSpPr txBox="1"/>
           <p:nvPr/>
         </p:nvSpPr>
@@ -3348,7 +3348,7 @@
       </p:sp>
       <p:sp>
         <p:nvSpPr>
-          <p:cNvPr id="1000157205" name="Text 5"/>
+          <p:cNvPr id="793616373" name="Text 5"/>
           <p:cNvSpPr txBox="1"/>
           <p:nvPr/>
         </p:nvSpPr>
@@ -3388,7 +3388,7 @@
       </p:sp>
       <p:sp>
         <p:nvSpPr>
-          <p:cNvPr id="2041524910" name="Text 6"/>
+          <p:cNvPr id="1832810511" name="Text 6"/>
           <p:cNvSpPr txBox="1"/>
           <p:nvPr/>
         </p:nvSpPr>
@@ -3431,7 +3431,7 @@
       </p:sp>
       <p:sp>
         <p:nvSpPr>
-          <p:cNvPr id="1856855691" name="Text 7"/>
+          <p:cNvPr id="781870158" name="Text 7"/>
           <p:cNvSpPr txBox="1"/>
           <p:nvPr/>
         </p:nvSpPr>
@@ -3474,7 +3474,7 @@
       </p:sp>
       <p:sp>
         <p:nvSpPr>
-          <p:cNvPr id="1748513961" name="Shape 8"/>
+          <p:cNvPr id="2084734402" name="Shape 8"/>
           <p:cNvSpPr/>
           <p:nvPr/>
         </p:nvSpPr>
@@ -3501,7 +3501,7 @@
       </p:sp>
       <p:sp>
         <p:nvSpPr>
-          <p:cNvPr id="95679558" name="Shape 9"/>
+          <p:cNvPr id="1115624867" name="Shape 9"/>
           <p:cNvSpPr/>
           <p:nvPr/>
         </p:nvSpPr>
@@ -3521,7 +3521,7 @@
       </p:sp>
       <p:sp>
         <p:nvSpPr>
-          <p:cNvPr id="2108246705" name="Text 10"/>
+          <p:cNvPr id="427554460" name="Text 10"/>
           <p:cNvSpPr txBox="1"/>
           <p:nvPr/>
         </p:nvSpPr>
@@ -3561,7 +3561,7 @@
       </p:sp>
       <p:sp>
         <p:nvSpPr>
-          <p:cNvPr id="1429271045" name="Text 11"/>
+          <p:cNvPr id="926169872" name="Text 11"/>
           <p:cNvSpPr txBox="1"/>
           <p:nvPr/>
         </p:nvSpPr>
@@ -3601,7 +3601,7 @@
       </p:sp>
       <p:sp>
         <p:nvSpPr>
-          <p:cNvPr id="1624288275" name="Text 12"/>
+          <p:cNvPr id="1288138482" name="Text 12"/>
           <p:cNvSpPr txBox="1"/>
           <p:nvPr/>
         </p:nvSpPr>
@@ -3644,7 +3644,7 @@
       </p:sp>
       <p:sp>
         <p:nvSpPr>
-          <p:cNvPr id="132767807" name="Text 13"/>
+          <p:cNvPr id="1476395380" name="Text 13"/>
           <p:cNvSpPr txBox="1"/>
           <p:nvPr/>
         </p:nvSpPr>
@@ -3687,7 +3687,7 @@
       </p:sp>
       <p:sp>
         <p:nvSpPr>
-          <p:cNvPr id="1034431537" name="Shape 14"/>
+          <p:cNvPr id="501428955" name="Shape 14"/>
           <p:cNvSpPr/>
           <p:nvPr/>
         </p:nvSpPr>
@@ -3714,7 +3714,7 @@
       </p:sp>
       <p:sp>
         <p:nvSpPr>
-          <p:cNvPr id="303027907" name="Shape 15"/>
+          <p:cNvPr id="1140669577" name="Shape 15"/>
           <p:cNvSpPr/>
           <p:nvPr/>
         </p:nvSpPr>
@@ -3734,7 +3734,7 @@
       </p:sp>
       <p:sp>
         <p:nvSpPr>
-          <p:cNvPr id="1621996208" name="Text 16"/>
+          <p:cNvPr id="135283957" name="Text 16"/>
           <p:cNvSpPr txBox="1"/>
           <p:nvPr/>
         </p:nvSpPr>
@@ -3774,7 +3774,7 @@
       </p:sp>
       <p:sp>
         <p:nvSpPr>
-          <p:cNvPr id="1686619056" name="Text 17"/>
+          <p:cNvPr id="1926204884" name="Text 17"/>
           <p:cNvSpPr txBox="1"/>
           <p:nvPr/>
         </p:nvSpPr>
@@ -3814,7 +3814,7 @@
       </p:sp>
       <p:sp>
         <p:nvSpPr>
-          <p:cNvPr id="1803239978" name="Text 18"/>
+          <p:cNvPr id="246628616" name="Text 18"/>
           <p:cNvSpPr txBox="1"/>
           <p:nvPr/>
         </p:nvSpPr>
@@ -3857,7 +3857,7 @@
       </p:sp>
       <p:sp>
         <p:nvSpPr>
-          <p:cNvPr id="1912808409" name="Text 19"/>
+          <p:cNvPr id="1905960877" name="Text 19"/>
           <p:cNvSpPr txBox="1"/>
           <p:nvPr/>
         </p:nvSpPr>
@@ -3900,7 +3900,7 @@
       </p:sp>
       <p:sp>
         <p:nvSpPr>
-          <p:cNvPr id="66722009" name="Shape 20"/>
+          <p:cNvPr id="306703922" name="Shape 20"/>
           <p:cNvSpPr/>
           <p:nvPr/>
         </p:nvSpPr>
@@ -3927,7 +3927,7 @@
       </p:sp>
       <p:sp>
         <p:nvSpPr>
-          <p:cNvPr id="533327322" name="Shape 21"/>
+          <p:cNvPr id="1064476178" name="Shape 21"/>
           <p:cNvSpPr/>
           <p:nvPr/>
         </p:nvSpPr>
@@ -3947,7 +3947,7 @@
       </p:sp>
       <p:sp>
         <p:nvSpPr>
-          <p:cNvPr id="1596430904" name="Text 22"/>
+          <p:cNvPr id="1190038610" name="Text 22"/>
           <p:cNvSpPr txBox="1"/>
           <p:nvPr/>
         </p:nvSpPr>
@@ -3987,7 +3987,7 @@
       </p:sp>
       <p:sp>
         <p:nvSpPr>
-          <p:cNvPr id="1756828752" name="Text 23"/>
+          <p:cNvPr id="679619835" name="Text 23"/>
           <p:cNvSpPr txBox="1"/>
           <p:nvPr/>
         </p:nvSpPr>
@@ -4027,7 +4027,7 @@
       </p:sp>
       <p:sp>
         <p:nvSpPr>
-          <p:cNvPr id="1837071332" name="Text 24"/>
+          <p:cNvPr id="1485630666" name="Text 24"/>
           <p:cNvSpPr txBox="1"/>
           <p:nvPr/>
         </p:nvSpPr>
@@ -4070,7 +4070,7 @@
       </p:sp>
       <p:sp>
         <p:nvSpPr>
-          <p:cNvPr id="1091521268" name="Text 25"/>
+          <p:cNvPr id="1804025550" name="Text 25"/>
           <p:cNvSpPr txBox="1"/>
           <p:nvPr/>
         </p:nvSpPr>
@@ -4157,7 +4157,7 @@
       </p:grpSpPr>
       <p:sp>
         <p:nvSpPr>
-          <p:cNvPr id="100552130" name="Text 0"/>
+          <p:cNvPr id="634676538" name="Text 0"/>
           <p:cNvSpPr txBox="1"/>
           <p:nvPr/>
         </p:nvSpPr>
@@ -4197,7 +4197,7 @@
       </p:sp>
       <p:sp>
         <p:nvSpPr>
-          <p:cNvPr id="1471201686" name="Text 1"/>
+          <p:cNvPr id="1983704475" name="Text 1"/>
           <p:cNvSpPr txBox="1"/>
           <p:nvPr/>
         </p:nvSpPr>
@@ -4237,7 +4237,7 @@
       </p:sp>
       <p:sp>
         <p:nvSpPr>
-          <p:cNvPr id="1364223652" name="Shape 2"/>
+          <p:cNvPr id="251136157" name="Shape 2"/>
           <p:cNvSpPr/>
           <p:nvPr/>
         </p:nvSpPr>
@@ -4266,7 +4266,7 @@
       </p:sp>
       <p:sp>
         <p:nvSpPr>
-          <p:cNvPr id="1277380423" name="Shape 3"/>
+          <p:cNvPr id="898800005" name="Shape 3"/>
           <p:cNvSpPr/>
           <p:nvPr/>
         </p:nvSpPr>
@@ -4288,7 +4288,7 @@
       </p:sp>
       <p:sp>
         <p:nvSpPr>
-          <p:cNvPr id="726759349" name="Shape 4"/>
+          <p:cNvPr id="741676166" name="Shape 4"/>
           <p:cNvSpPr/>
           <p:nvPr/>
         </p:nvSpPr>
@@ -4308,7 +4308,7 @@
       </p:sp>
       <p:sp>
         <p:nvSpPr>
-          <p:cNvPr id="1541950800" name="Text 5"/>
+          <p:cNvPr id="1719448276" name="Text 5"/>
           <p:cNvSpPr txBox="1"/>
           <p:nvPr/>
         </p:nvSpPr>
@@ -4348,7 +4348,7 @@
       </p:sp>
       <p:sp>
         <p:nvSpPr>
-          <p:cNvPr id="1964280109" name="Text 6"/>
+          <p:cNvPr id="987467007" name="Text 6"/>
           <p:cNvSpPr txBox="1"/>
           <p:nvPr/>
         </p:nvSpPr>
@@ -4391,7 +4391,7 @@
       </p:sp>
       <p:sp>
         <p:nvSpPr>
-          <p:cNvPr id="1674043992" name="Shape 7"/>
+          <p:cNvPr id="2085759180" name="Shape 7"/>
           <p:cNvSpPr/>
           <p:nvPr/>
         </p:nvSpPr>
@@ -4418,7 +4418,7 @@
       </p:sp>
       <p:sp>
         <p:nvSpPr>
-          <p:cNvPr id="119836090" name="Text 8"/>
+          <p:cNvPr id="1310084471" name="Text 8"/>
           <p:cNvSpPr txBox="1"/>
           <p:nvPr/>
         </p:nvSpPr>
@@ -4458,7 +4458,7 @@
       </p:sp>
       <p:sp>
         <p:nvSpPr>
-          <p:cNvPr id="54528468" name="Shape 9"/>
+          <p:cNvPr id="348018843" name="Shape 9"/>
           <p:cNvSpPr/>
           <p:nvPr/>
         </p:nvSpPr>
@@ -4487,7 +4487,7 @@
       </p:sp>
       <p:sp>
         <p:nvSpPr>
-          <p:cNvPr id="1989447016" name="Shape 10"/>
+          <p:cNvPr id="609519920" name="Shape 10"/>
           <p:cNvSpPr/>
           <p:nvPr/>
         </p:nvSpPr>
@@ -4509,7 +4509,7 @@
       </p:sp>
       <p:sp>
         <p:nvSpPr>
-          <p:cNvPr id="558055827" name="Shape 11"/>
+          <p:cNvPr id="1494732695" name="Shape 11"/>
           <p:cNvSpPr/>
           <p:nvPr/>
         </p:nvSpPr>
@@ -4529,7 +4529,7 @@
       </p:sp>
       <p:sp>
         <p:nvSpPr>
-          <p:cNvPr id="521688995" name="Text 12"/>
+          <p:cNvPr id="380955462" name="Text 12"/>
           <p:cNvSpPr txBox="1"/>
           <p:nvPr/>
         </p:nvSpPr>
@@ -4569,7 +4569,7 @@
       </p:sp>
       <p:sp>
         <p:nvSpPr>
-          <p:cNvPr id="190461322" name="Text 13"/>
+          <p:cNvPr id="812329063" name="Text 13"/>
           <p:cNvSpPr txBox="1"/>
           <p:nvPr/>
         </p:nvSpPr>
@@ -4612,7 +4612,7 @@
       </p:sp>
       <p:sp>
         <p:nvSpPr>
-          <p:cNvPr id="1558471404" name="Shape 14"/>
+          <p:cNvPr id="1217232702" name="Shape 14"/>
           <p:cNvSpPr/>
           <p:nvPr/>
         </p:nvSpPr>
@@ -4639,7 +4639,7 @@
       </p:sp>
       <p:sp>
         <p:nvSpPr>
-          <p:cNvPr id="418450845" name="Text 15"/>
+          <p:cNvPr id="1382786269" name="Text 15"/>
           <p:cNvSpPr txBox="1"/>
           <p:nvPr/>
         </p:nvSpPr>
@@ -4679,7 +4679,7 @@
       </p:sp>
       <p:sp>
         <p:nvSpPr>
-          <p:cNvPr id="135511971" name="Shape 16"/>
+          <p:cNvPr id="40945835" name="Shape 16"/>
           <p:cNvSpPr/>
           <p:nvPr/>
         </p:nvSpPr>
@@ -4708,7 +4708,7 @@
       </p:sp>
       <p:sp>
         <p:nvSpPr>
-          <p:cNvPr id="1199834396" name="Shape 17"/>
+          <p:cNvPr id="26247660" name="Shape 17"/>
           <p:cNvSpPr/>
           <p:nvPr/>
         </p:nvSpPr>
@@ -4730,7 +4730,7 @@
       </p:sp>
       <p:sp>
         <p:nvSpPr>
-          <p:cNvPr id="616317196" name="Shape 18"/>
+          <p:cNvPr id="29320030" name="Shape 18"/>
           <p:cNvSpPr/>
           <p:nvPr/>
         </p:nvSpPr>
@@ -4750,7 +4750,7 @@
       </p:sp>
       <p:sp>
         <p:nvSpPr>
-          <p:cNvPr id="1483740224" name="Text 19"/>
+          <p:cNvPr id="1981821614" name="Text 19"/>
           <p:cNvSpPr txBox="1"/>
           <p:nvPr/>
         </p:nvSpPr>
@@ -4790,7 +4790,7 @@
       </p:sp>
       <p:sp>
         <p:nvSpPr>
-          <p:cNvPr id="1472154299" name="Text 20"/>
+          <p:cNvPr id="1964778839" name="Text 20"/>
           <p:cNvSpPr txBox="1"/>
           <p:nvPr/>
         </p:nvSpPr>
@@ -4833,7 +4833,7 @@
       </p:sp>
       <p:sp>
         <p:nvSpPr>
-          <p:cNvPr id="722565546" name="Shape 21"/>
+          <p:cNvPr id="1734718785" name="Shape 21"/>
           <p:cNvSpPr/>
           <p:nvPr/>
         </p:nvSpPr>
@@ -4860,7 +4860,7 @@
       </p:sp>
       <p:sp>
         <p:nvSpPr>
-          <p:cNvPr id="1707806480" name="Text 22"/>
+          <p:cNvPr id="549698581" name="Text 22"/>
           <p:cNvSpPr txBox="1"/>
           <p:nvPr/>
         </p:nvSpPr>
@@ -4900,7 +4900,7 @@
       </p:sp>
       <p:sp>
         <p:nvSpPr>
-          <p:cNvPr id="215098674" name="Text 23"/>
+          <p:cNvPr id="742952113" name="Text 23"/>
           <p:cNvSpPr txBox="1"/>
           <p:nvPr/>
         </p:nvSpPr>
@@ -4935,38 +4935,6 @@
               <a:t>This deck focuses on Prevention — the easiest one to understand. Let's dive in!</a:t>
             </a:r>
             <a:endParaRPr lang="en-US" sz="1250"/>
-          </a:p>
-        </p:txBody>
-      </p:sp>
-      <p:sp>
-        <p:nvSpPr>
-          <p:cNvPr id="1108542092" name=""/>
-          <p:cNvSpPr txBox="1"/>
-          <p:nvPr/>
-        </p:nvSpPr>
-        <p:spPr bwMode="auto">
-          <a:xfrm rot="0" flipH="0" flipV="0">
-            <a:off x="3628677" y="3246120"/>
-            <a:ext cx="4934644" cy="365759"/>
-          </a:xfrm>
-          <a:prstGeom prst="rect">
-            <a:avLst/>
-          </a:prstGeom>
-          <a:noFill/>
-        </p:spPr>
-        <p:txBody>
-          <a:bodyPr vertOverflow="overflow" horzOverflow="overflow" vert="horz" wrap="square" lIns="91440" tIns="45720" rIns="91440" bIns="45720" numCol="1" spcCol="0" rtlCol="0" fromWordArt="0" anchor="t" anchorCtr="0" forceAA="0" upright="0" compatLnSpc="0">
-            <a:spAutoFit/>
-          </a:bodyPr>
-          <a:p>
-            <a:pPr algn="l">
-              <a:defRPr/>
-            </a:pPr>
-            <a:r>
-              <a:rPr/>
-              <a:t>https://www.youtube.com/watch?v=1LQ-W4RKitU</a:t>
-            </a:r>
-            <a:endParaRPr/>
           </a:p>
         </p:txBody>
       </p:sp>
@@ -5016,7 +4984,7 @@
       </p:grpSpPr>
       <p:sp>
         <p:nvSpPr>
-          <p:cNvPr id="1976869704" name="Text 0"/>
+          <p:cNvPr id="476819859" name="Text 0"/>
           <p:cNvSpPr txBox="1"/>
           <p:nvPr/>
         </p:nvSpPr>
@@ -5056,7 +5024,7 @@
       </p:sp>
       <p:sp>
         <p:nvSpPr>
-          <p:cNvPr id="5848940" name="Text 1"/>
+          <p:cNvPr id="1175469876" name="Text 1"/>
           <p:cNvSpPr txBox="1"/>
           <p:nvPr/>
         </p:nvSpPr>
@@ -5096,7 +5064,7 @@
       </p:sp>
       <p:sp>
         <p:nvSpPr>
-          <p:cNvPr id="221450069" name="Shape 2"/>
+          <p:cNvPr id="1905571707" name="Shape 2"/>
           <p:cNvSpPr/>
           <p:nvPr/>
         </p:nvSpPr>
@@ -5118,7 +5086,7 @@
       </p:sp>
       <p:sp>
         <p:nvSpPr>
-          <p:cNvPr id="190277982" name="Shape 3"/>
+          <p:cNvPr id="1387940773" name="Shape 3"/>
           <p:cNvSpPr/>
           <p:nvPr/>
         </p:nvSpPr>
@@ -5140,7 +5108,7 @@
       </p:sp>
       <p:sp>
         <p:nvSpPr>
-          <p:cNvPr id="571556319" name="Text 4"/>
+          <p:cNvPr id="1678084569" name="Text 4"/>
           <p:cNvSpPr txBox="1"/>
           <p:nvPr/>
         </p:nvSpPr>
@@ -5180,7 +5148,7 @@
       </p:sp>
       <p:sp>
         <p:nvSpPr>
-          <p:cNvPr id="587744795" name="Text 5"/>
+          <p:cNvPr id="739060739" name="Text 5"/>
           <p:cNvSpPr txBox="1"/>
           <p:nvPr/>
         </p:nvSpPr>
@@ -5223,7 +5191,7 @@
       </p:sp>
       <p:sp>
         <p:nvSpPr>
-          <p:cNvPr id="1916340709" name="Shape 6"/>
+          <p:cNvPr id="2019850947" name="Shape 6"/>
           <p:cNvSpPr/>
           <p:nvPr/>
         </p:nvSpPr>
@@ -5245,7 +5213,7 @@
       </p:sp>
       <p:sp>
         <p:nvSpPr>
-          <p:cNvPr id="877395389" name="Shape 7"/>
+          <p:cNvPr id="1632173257" name="Shape 7"/>
           <p:cNvSpPr/>
           <p:nvPr/>
         </p:nvSpPr>
@@ -5267,7 +5235,7 @@
       </p:sp>
       <p:sp>
         <p:nvSpPr>
-          <p:cNvPr id="205126198" name="Text 8"/>
+          <p:cNvPr id="859206212" name="Text 8"/>
           <p:cNvSpPr txBox="1"/>
           <p:nvPr/>
         </p:nvSpPr>
@@ -5307,7 +5275,7 @@
       </p:sp>
       <p:sp>
         <p:nvSpPr>
-          <p:cNvPr id="11645047" name="Text 9"/>
+          <p:cNvPr id="1126061879" name="Text 9"/>
           <p:cNvSpPr txBox="1"/>
           <p:nvPr/>
         </p:nvSpPr>
@@ -5350,7 +5318,7 @@
       </p:sp>
       <p:sp>
         <p:nvSpPr>
-          <p:cNvPr id="1413270987" name="Shape 10"/>
+          <p:cNvPr id="260822143" name="Shape 10"/>
           <p:cNvSpPr/>
           <p:nvPr/>
         </p:nvSpPr>
@@ -5372,7 +5340,7 @@
       </p:sp>
       <p:sp>
         <p:nvSpPr>
-          <p:cNvPr id="178231288" name="Shape 11"/>
+          <p:cNvPr id="334584927" name="Shape 11"/>
           <p:cNvSpPr/>
           <p:nvPr/>
         </p:nvSpPr>
@@ -5394,7 +5362,7 @@
       </p:sp>
       <p:sp>
         <p:nvSpPr>
-          <p:cNvPr id="1967474375" name="Text 12"/>
+          <p:cNvPr id="836114148" name="Text 12"/>
           <p:cNvSpPr txBox="1"/>
           <p:nvPr/>
         </p:nvSpPr>
@@ -5434,7 +5402,7 @@
       </p:sp>
       <p:sp>
         <p:nvSpPr>
-          <p:cNvPr id="1133461869" name="Text 13"/>
+          <p:cNvPr id="1881210241" name="Text 13"/>
           <p:cNvSpPr txBox="1"/>
           <p:nvPr/>
         </p:nvSpPr>
@@ -5477,7 +5445,7 @@
       </p:sp>
       <p:sp>
         <p:nvSpPr>
-          <p:cNvPr id="1645946268" name="Shape 14"/>
+          <p:cNvPr id="116588826" name="Shape 14"/>
           <p:cNvSpPr/>
           <p:nvPr/>
         </p:nvSpPr>
@@ -5499,7 +5467,7 @@
       </p:sp>
       <p:sp>
         <p:nvSpPr>
-          <p:cNvPr id="1602746436" name="Shape 15"/>
+          <p:cNvPr id="423460878" name="Shape 15"/>
           <p:cNvSpPr/>
           <p:nvPr/>
         </p:nvSpPr>
@@ -5521,7 +5489,7 @@
       </p:sp>
       <p:sp>
         <p:nvSpPr>
-          <p:cNvPr id="1223995063" name="Text 16"/>
+          <p:cNvPr id="2004767187" name="Text 16"/>
           <p:cNvSpPr txBox="1"/>
           <p:nvPr/>
         </p:nvSpPr>
@@ -5561,7 +5529,7 @@
       </p:sp>
       <p:sp>
         <p:nvSpPr>
-          <p:cNvPr id="763768894" name="Text 17"/>
+          <p:cNvPr id="1269494315" name="Text 17"/>
           <p:cNvSpPr txBox="1"/>
           <p:nvPr/>
         </p:nvSpPr>
@@ -5648,7 +5616,7 @@
       </p:grpSpPr>
       <p:sp>
         <p:nvSpPr>
-          <p:cNvPr id="1551432453" name="Text 0"/>
+          <p:cNvPr id="1389794382" name="Text 0"/>
           <p:cNvSpPr txBox="1"/>
           <p:nvPr/>
         </p:nvSpPr>
@@ -5688,7 +5656,7 @@
       </p:sp>
       <p:sp>
         <p:nvSpPr>
-          <p:cNvPr id="1307309481" name="Shape 1"/>
+          <p:cNvPr id="1311805657" name="Shape 1"/>
           <p:cNvSpPr/>
           <p:nvPr/>
         </p:nvSpPr>
@@ -5710,7 +5678,7 @@
       </p:sp>
       <p:sp>
         <p:nvSpPr>
-          <p:cNvPr id="1113588264" name="Shape 2"/>
+          <p:cNvPr id="184807274" name="Shape 2"/>
           <p:cNvSpPr/>
           <p:nvPr/>
         </p:nvSpPr>
@@ -5732,7 +5700,7 @@
       </p:sp>
       <p:sp>
         <p:nvSpPr>
-          <p:cNvPr id="1281788603" name="Text 3"/>
+          <p:cNvPr id="814177672" name="Text 3"/>
           <p:cNvSpPr txBox="1"/>
           <p:nvPr/>
         </p:nvSpPr>
@@ -5772,7 +5740,7 @@
       </p:sp>
       <p:sp>
         <p:nvSpPr>
-          <p:cNvPr id="876859562" name="Text 4"/>
+          <p:cNvPr id="1939269784" name="Text 4"/>
           <p:cNvSpPr txBox="1"/>
           <p:nvPr/>
         </p:nvSpPr>
@@ -5812,7 +5780,7 @@
       </p:sp>
       <p:sp>
         <p:nvSpPr>
-          <p:cNvPr id="1138976994" name="Text 5"/>
+          <p:cNvPr id="1050917932" name="Text 5"/>
           <p:cNvSpPr txBox="1"/>
           <p:nvPr/>
         </p:nvSpPr>
@@ -5855,7 +5823,7 @@
       </p:sp>
       <p:sp>
         <p:nvSpPr>
-          <p:cNvPr id="390208324" name="Shape 6"/>
+          <p:cNvPr id="1777412518" name="Shape 6"/>
           <p:cNvSpPr/>
           <p:nvPr/>
         </p:nvSpPr>
@@ -5875,7 +5843,7 @@
       </p:sp>
       <p:sp>
         <p:nvSpPr>
-          <p:cNvPr id="1147101711" name="Text 7"/>
+          <p:cNvPr id="259083013" name="Text 7"/>
           <p:cNvSpPr txBox="1"/>
           <p:nvPr/>
         </p:nvSpPr>
@@ -5918,7 +5886,7 @@
       </p:sp>
       <p:sp>
         <p:nvSpPr>
-          <p:cNvPr id="2035819737" name="Shape 8"/>
+          <p:cNvPr id="494280148" name="Shape 8"/>
           <p:cNvSpPr/>
           <p:nvPr/>
         </p:nvSpPr>
@@ -5938,7 +5906,7 @@
       </p:sp>
       <p:sp>
         <p:nvSpPr>
-          <p:cNvPr id="724682981" name="Text 9"/>
+          <p:cNvPr id="2050802239" name="Text 9"/>
           <p:cNvSpPr txBox="1"/>
           <p:nvPr/>
         </p:nvSpPr>
@@ -5981,7 +5949,7 @@
       </p:sp>
       <p:sp>
         <p:nvSpPr>
-          <p:cNvPr id="1563509917" name="Shape 10"/>
+          <p:cNvPr id="895207507" name="Shape 10"/>
           <p:cNvSpPr/>
           <p:nvPr/>
         </p:nvSpPr>
@@ -6004,7 +5972,7 @@
       </p:sp>
       <p:sp>
         <p:nvSpPr>
-          <p:cNvPr id="1294565309" name="Shape 11"/>
+          <p:cNvPr id="1865821578" name="Shape 11"/>
           <p:cNvSpPr/>
           <p:nvPr/>
         </p:nvSpPr>
@@ -6026,7 +5994,7 @@
       </p:sp>
       <p:sp>
         <p:nvSpPr>
-          <p:cNvPr id="341433848" name="Text 12"/>
+          <p:cNvPr id="25581368" name="Text 12"/>
           <p:cNvSpPr txBox="1"/>
           <p:nvPr/>
         </p:nvSpPr>
@@ -6066,7 +6034,7 @@
       </p:sp>
       <p:sp>
         <p:nvSpPr>
-          <p:cNvPr id="1215807322" name="Text 13"/>
+          <p:cNvPr id="2008413828" name="Text 13"/>
           <p:cNvSpPr txBox="1"/>
           <p:nvPr/>
         </p:nvSpPr>
@@ -6106,7 +6074,7 @@
       </p:sp>
       <p:sp>
         <p:nvSpPr>
-          <p:cNvPr id="1719655212" name="Text 14"/>
+          <p:cNvPr id="486346276" name="Text 14"/>
           <p:cNvSpPr txBox="1"/>
           <p:nvPr/>
         </p:nvSpPr>
@@ -6149,7 +6117,7 @@
       </p:sp>
       <p:sp>
         <p:nvSpPr>
-          <p:cNvPr id="1426513913" name="Shape 15"/>
+          <p:cNvPr id="1018025705" name="Shape 15"/>
           <p:cNvSpPr/>
           <p:nvPr/>
         </p:nvSpPr>
@@ -6176,7 +6144,7 @@
       </p:sp>
       <p:sp>
         <p:nvSpPr>
-          <p:cNvPr id="1138632688" name="Text 16"/>
+          <p:cNvPr id="1382526398" name="Text 16"/>
           <p:cNvSpPr txBox="1"/>
           <p:nvPr/>
         </p:nvSpPr>
@@ -6216,7 +6184,7 @@
       </p:sp>
       <p:sp>
         <p:nvSpPr>
-          <p:cNvPr id="1724085498" name="Text 17"/>
+          <p:cNvPr id="1842830775" name="Text 17"/>
           <p:cNvSpPr txBox="1"/>
           <p:nvPr/>
         </p:nvSpPr>
@@ -6259,7 +6227,7 @@
       </p:sp>
       <p:sp>
         <p:nvSpPr>
-          <p:cNvPr id="1961978351" name="Shape 18"/>
+          <p:cNvPr id="540266375" name="Shape 18"/>
           <p:cNvSpPr/>
           <p:nvPr/>
         </p:nvSpPr>
@@ -6286,7 +6254,7 @@
       </p:sp>
       <p:sp>
         <p:nvSpPr>
-          <p:cNvPr id="1211378941" name="Text 19"/>
+          <p:cNvPr id="973115802" name="Text 19"/>
           <p:cNvSpPr txBox="1"/>
           <p:nvPr/>
         </p:nvSpPr>
@@ -6326,7 +6294,7 @@
       </p:sp>
       <p:sp>
         <p:nvSpPr>
-          <p:cNvPr id="488936973" name="Text 20"/>
+          <p:cNvPr id="145059606" name="Text 20"/>
           <p:cNvSpPr txBox="1"/>
           <p:nvPr/>
         </p:nvSpPr>
@@ -6435,7 +6403,7 @@
       </p:grpSpPr>
       <p:sp>
         <p:nvSpPr>
-          <p:cNvPr id="1635662809" name="Text 0"/>
+          <p:cNvPr id="1351160546" name="Text 0"/>
           <p:cNvSpPr txBox="1"/>
           <p:nvPr/>
         </p:nvSpPr>
@@ -6475,7 +6443,7 @@
       </p:sp>
       <p:sp>
         <p:nvSpPr>
-          <p:cNvPr id="1349258656" name="Shape 1"/>
+          <p:cNvPr id="133858878" name="Shape 1"/>
           <p:cNvSpPr/>
           <p:nvPr/>
         </p:nvSpPr>
@@ -6497,7 +6465,7 @@
       </p:sp>
       <p:sp>
         <p:nvSpPr>
-          <p:cNvPr id="1439817140" name="Shape 2"/>
+          <p:cNvPr id="1374642280" name="Shape 2"/>
           <p:cNvSpPr/>
           <p:nvPr/>
         </p:nvSpPr>
@@ -6519,7 +6487,7 @@
       </p:sp>
       <p:sp>
         <p:nvSpPr>
-          <p:cNvPr id="305934635" name="Text 3"/>
+          <p:cNvPr id="1960631084" name="Text 3"/>
           <p:cNvSpPr txBox="1"/>
           <p:nvPr/>
         </p:nvSpPr>
@@ -6559,7 +6527,7 @@
       </p:sp>
       <p:sp>
         <p:nvSpPr>
-          <p:cNvPr id="1042222235" name="Text 4"/>
+          <p:cNvPr id="1712400203" name="Text 4"/>
           <p:cNvSpPr txBox="1"/>
           <p:nvPr/>
         </p:nvSpPr>
@@ -6599,7 +6567,7 @@
       </p:sp>
       <p:sp>
         <p:nvSpPr>
-          <p:cNvPr id="925918876" name="Text 5"/>
+          <p:cNvPr id="1243584118" name="Text 5"/>
           <p:cNvSpPr txBox="1"/>
           <p:nvPr/>
         </p:nvSpPr>
@@ -6642,7 +6610,7 @@
       </p:sp>
       <p:sp>
         <p:nvSpPr>
-          <p:cNvPr id="660849146" name="Shape 6"/>
+          <p:cNvPr id="762151755" name="Shape 6"/>
           <p:cNvSpPr/>
           <p:nvPr/>
         </p:nvSpPr>
@@ -6662,7 +6630,7 @@
       </p:sp>
       <p:sp>
         <p:nvSpPr>
-          <p:cNvPr id="1664469051" name="Text 7"/>
+          <p:cNvPr id="762058087" name="Text 7"/>
           <p:cNvSpPr txBox="1"/>
           <p:nvPr/>
         </p:nvSpPr>
@@ -6705,7 +6673,7 @@
       </p:sp>
       <p:sp>
         <p:nvSpPr>
-          <p:cNvPr id="502168485" name="Shape 8"/>
+          <p:cNvPr id="2006555917" name="Shape 8"/>
           <p:cNvSpPr/>
           <p:nvPr/>
         </p:nvSpPr>
@@ -6725,7 +6693,7 @@
       </p:sp>
       <p:sp>
         <p:nvSpPr>
-          <p:cNvPr id="1160888665" name="Text 9"/>
+          <p:cNvPr id="1223260594" name="Text 9"/>
           <p:cNvSpPr txBox="1"/>
           <p:nvPr/>
         </p:nvSpPr>
@@ -6768,7 +6736,7 @@
       </p:sp>
       <p:sp>
         <p:nvSpPr>
-          <p:cNvPr id="1720350375" name="Shape 10"/>
+          <p:cNvPr id="204736937" name="Shape 10"/>
           <p:cNvSpPr/>
           <p:nvPr/>
         </p:nvSpPr>
@@ -6791,7 +6759,7 @@
       </p:sp>
       <p:sp>
         <p:nvSpPr>
-          <p:cNvPr id="250275711" name="Shape 11"/>
+          <p:cNvPr id="1818212205" name="Shape 11"/>
           <p:cNvSpPr/>
           <p:nvPr/>
         </p:nvSpPr>
@@ -6813,7 +6781,7 @@
       </p:sp>
       <p:sp>
         <p:nvSpPr>
-          <p:cNvPr id="1795141566" name="Text 12"/>
+          <p:cNvPr id="1725011816" name="Text 12"/>
           <p:cNvSpPr txBox="1"/>
           <p:nvPr/>
         </p:nvSpPr>
@@ -6853,7 +6821,7 @@
       </p:sp>
       <p:sp>
         <p:nvSpPr>
-          <p:cNvPr id="247855611" name="Text 13"/>
+          <p:cNvPr id="276782503" name="Text 13"/>
           <p:cNvSpPr txBox="1"/>
           <p:nvPr/>
         </p:nvSpPr>
@@ -6893,7 +6861,7 @@
       </p:sp>
       <p:sp>
         <p:nvSpPr>
-          <p:cNvPr id="517706778" name="Text 14"/>
+          <p:cNvPr id="1843889991" name="Text 14"/>
           <p:cNvSpPr txBox="1"/>
           <p:nvPr/>
         </p:nvSpPr>
@@ -6936,7 +6904,7 @@
       </p:sp>
       <p:sp>
         <p:nvSpPr>
-          <p:cNvPr id="166284354" name="Shape 15"/>
+          <p:cNvPr id="568138545" name="Shape 15"/>
           <p:cNvSpPr/>
           <p:nvPr/>
         </p:nvSpPr>
@@ -6963,7 +6931,7 @@
       </p:sp>
       <p:sp>
         <p:nvSpPr>
-          <p:cNvPr id="1033972774" name="Text 16"/>
+          <p:cNvPr id="391852866" name="Text 16"/>
           <p:cNvSpPr txBox="1"/>
           <p:nvPr/>
         </p:nvSpPr>
@@ -7003,7 +6971,7 @@
       </p:sp>
       <p:sp>
         <p:nvSpPr>
-          <p:cNvPr id="638665414" name="Shape 17"/>
+          <p:cNvPr id="1577682720" name="Shape 17"/>
           <p:cNvSpPr/>
           <p:nvPr/>
         </p:nvSpPr>
@@ -7030,7 +6998,7 @@
       </p:sp>
       <p:sp>
         <p:nvSpPr>
-          <p:cNvPr id="670529354" name="Shape 18"/>
+          <p:cNvPr id="1370514902" name="Shape 18"/>
           <p:cNvSpPr/>
           <p:nvPr/>
         </p:nvSpPr>
@@ -7050,7 +7018,7 @@
       </p:sp>
       <p:sp>
         <p:nvSpPr>
-          <p:cNvPr id="1315192383" name="Text 19"/>
+          <p:cNvPr id="661762855" name="Text 19"/>
           <p:cNvSpPr txBox="1"/>
           <p:nvPr/>
         </p:nvSpPr>
@@ -7090,7 +7058,7 @@
       </p:sp>
       <p:sp>
         <p:nvSpPr>
-          <p:cNvPr id="177010235" name="Text 20"/>
+          <p:cNvPr id="1932001602" name="Text 20"/>
           <p:cNvSpPr txBox="1"/>
           <p:nvPr/>
         </p:nvSpPr>
@@ -7130,7 +7098,7 @@
       </p:sp>
       <p:sp>
         <p:nvSpPr>
-          <p:cNvPr id="1082763517" name="Shape 21"/>
+          <p:cNvPr id="1527365050" name="Shape 21"/>
           <p:cNvSpPr/>
           <p:nvPr/>
         </p:nvSpPr>
@@ -7154,7 +7122,7 @@
       </p:sp>
       <p:sp>
         <p:nvSpPr>
-          <p:cNvPr id="1632028211" name="Shape 22"/>
+          <p:cNvPr id="1229940979" name="Shape 22"/>
           <p:cNvSpPr/>
           <p:nvPr/>
         </p:nvSpPr>
@@ -7181,7 +7149,7 @@
       </p:sp>
       <p:sp>
         <p:nvSpPr>
-          <p:cNvPr id="364036096" name="Shape 23"/>
+          <p:cNvPr id="1856030935" name="Shape 23"/>
           <p:cNvSpPr/>
           <p:nvPr/>
         </p:nvSpPr>
@@ -7201,7 +7169,7 @@
       </p:sp>
       <p:sp>
         <p:nvSpPr>
-          <p:cNvPr id="888805083" name="Text 24"/>
+          <p:cNvPr id="834805798" name="Text 24"/>
           <p:cNvSpPr txBox="1"/>
           <p:nvPr/>
         </p:nvSpPr>
@@ -7241,7 +7209,7 @@
       </p:sp>
       <p:sp>
         <p:nvSpPr>
-          <p:cNvPr id="358572742" name="Text 25"/>
+          <p:cNvPr id="1193380120" name="Text 25"/>
           <p:cNvSpPr txBox="1"/>
           <p:nvPr/>
         </p:nvSpPr>
@@ -7281,7 +7249,7 @@
       </p:sp>
       <p:sp>
         <p:nvSpPr>
-          <p:cNvPr id="1462824395" name="Shape 26"/>
+          <p:cNvPr id="750360499" name="Shape 26"/>
           <p:cNvSpPr/>
           <p:nvPr/>
         </p:nvSpPr>
@@ -7305,7 +7273,7 @@
       </p:sp>
       <p:sp>
         <p:nvSpPr>
-          <p:cNvPr id="318459800" name="Shape 27"/>
+          <p:cNvPr id="1503152182" name="Shape 27"/>
           <p:cNvSpPr/>
           <p:nvPr/>
         </p:nvSpPr>
@@ -7332,7 +7300,7 @@
       </p:sp>
       <p:sp>
         <p:nvSpPr>
-          <p:cNvPr id="889812080" name="Shape 28"/>
+          <p:cNvPr id="153546988" name="Shape 28"/>
           <p:cNvSpPr/>
           <p:nvPr/>
         </p:nvSpPr>
@@ -7352,7 +7320,7 @@
       </p:sp>
       <p:sp>
         <p:nvSpPr>
-          <p:cNvPr id="526415997" name="Text 29"/>
+          <p:cNvPr id="1841718270" name="Text 29"/>
           <p:cNvSpPr txBox="1"/>
           <p:nvPr/>
         </p:nvSpPr>
@@ -7392,7 +7360,7 @@
       </p:sp>
       <p:sp>
         <p:nvSpPr>
-          <p:cNvPr id="1515989857" name="Text 30"/>
+          <p:cNvPr id="98736772" name="Text 30"/>
           <p:cNvSpPr txBox="1"/>
           <p:nvPr/>
         </p:nvSpPr>
@@ -7432,7 +7400,7 @@
       </p:sp>
       <p:sp>
         <p:nvSpPr>
-          <p:cNvPr id="2002623122" name="Shape 31"/>
+          <p:cNvPr id="1692675959" name="Shape 31"/>
           <p:cNvSpPr/>
           <p:nvPr/>
         </p:nvSpPr>
@@ -7456,7 +7424,7 @@
       </p:sp>
       <p:sp>
         <p:nvSpPr>
-          <p:cNvPr id="1898105613" name="Shape 32"/>
+          <p:cNvPr id="1133910167" name="Shape 32"/>
           <p:cNvSpPr/>
           <p:nvPr/>
         </p:nvSpPr>
@@ -7483,7 +7451,7 @@
       </p:sp>
       <p:sp>
         <p:nvSpPr>
-          <p:cNvPr id="757645163" name="Shape 33"/>
+          <p:cNvPr id="1102451342" name="Shape 33"/>
           <p:cNvSpPr/>
           <p:nvPr/>
         </p:nvSpPr>
@@ -7503,7 +7471,7 @@
       </p:sp>
       <p:sp>
         <p:nvSpPr>
-          <p:cNvPr id="298204190" name="Text 34"/>
+          <p:cNvPr id="1203858781" name="Text 34"/>
           <p:cNvSpPr txBox="1"/>
           <p:nvPr/>
         </p:nvSpPr>
@@ -7543,7 +7511,7 @@
       </p:sp>
       <p:sp>
         <p:nvSpPr>
-          <p:cNvPr id="719193254" name="Text 35"/>
+          <p:cNvPr id="419523185" name="Text 35"/>
           <p:cNvSpPr txBox="1"/>
           <p:nvPr/>
         </p:nvSpPr>
@@ -7583,7 +7551,7 @@
       </p:sp>
       <p:sp>
         <p:nvSpPr>
-          <p:cNvPr id="1303655782" name="Text 36"/>
+          <p:cNvPr id="262994123" name="Text 36"/>
           <p:cNvSpPr txBox="1"/>
           <p:nvPr/>
         </p:nvSpPr>
@@ -7670,7 +7638,7 @@
       </p:grpSpPr>
       <p:sp>
         <p:nvSpPr>
-          <p:cNvPr id="691362092" name="Text 0"/>
+          <p:cNvPr id="1732094832" name="Text 0"/>
           <p:cNvSpPr txBox="1"/>
           <p:nvPr/>
         </p:nvSpPr>
@@ -7710,7 +7678,7 @@
       </p:sp>
       <p:sp>
         <p:nvSpPr>
-          <p:cNvPr id="810149834" name="Text 1"/>
+          <p:cNvPr id="1950897684" name="Text 1"/>
           <p:cNvSpPr txBox="1"/>
           <p:nvPr/>
         </p:nvSpPr>
@@ -7750,7 +7718,7 @@
       </p:sp>
       <p:sp>
         <p:nvSpPr>
-          <p:cNvPr id="238291044" name="Shape 2"/>
+          <p:cNvPr id="1893712470" name="Shape 2"/>
           <p:cNvSpPr/>
           <p:nvPr/>
         </p:nvSpPr>
@@ -7775,7 +7743,7 @@
       </p:sp>
       <p:sp>
         <p:nvSpPr>
-          <p:cNvPr id="1059081848" name="Text 3"/>
+          <p:cNvPr id="1009261578" name="Text 3"/>
           <p:cNvSpPr txBox="1"/>
           <p:nvPr/>
         </p:nvSpPr>
@@ -7815,7 +7783,7 @@
       </p:sp>
       <p:sp>
         <p:nvSpPr>
-          <p:cNvPr id="288151961" name="Shape 4"/>
+          <p:cNvPr id="1868823308" name="Shape 4"/>
           <p:cNvSpPr/>
           <p:nvPr/>
         </p:nvSpPr>
@@ -7840,7 +7808,7 @@
       </p:sp>
       <p:sp>
         <p:nvSpPr>
-          <p:cNvPr id="1852138509" name="Text 5"/>
+          <p:cNvPr id="1769316699" name="Text 5"/>
           <p:cNvSpPr txBox="1"/>
           <p:nvPr/>
         </p:nvSpPr>
@@ -7880,7 +7848,7 @@
       </p:sp>
       <p:sp>
         <p:nvSpPr>
-          <p:cNvPr id="1565561625" name="Shape 6"/>
+          <p:cNvPr id="1758441439" name="Shape 6"/>
           <p:cNvSpPr/>
           <p:nvPr/>
         </p:nvSpPr>
@@ -7905,7 +7873,7 @@
       </p:sp>
       <p:sp>
         <p:nvSpPr>
-          <p:cNvPr id="1869114876" name="Text 7"/>
+          <p:cNvPr id="259147477" name="Text 7"/>
           <p:cNvSpPr txBox="1"/>
           <p:nvPr/>
         </p:nvSpPr>
@@ -7945,7 +7913,7 @@
       </p:sp>
       <p:sp>
         <p:nvSpPr>
-          <p:cNvPr id="1445570174" name="Shape 8"/>
+          <p:cNvPr id="1806898240" name="Shape 8"/>
           <p:cNvSpPr/>
           <p:nvPr/>
         </p:nvSpPr>
@@ -7970,7 +7938,7 @@
       </p:sp>
       <p:sp>
         <p:nvSpPr>
-          <p:cNvPr id="498103424" name="Text 9"/>
+          <p:cNvPr id="552046280" name="Text 9"/>
           <p:cNvSpPr txBox="1"/>
           <p:nvPr/>
         </p:nvSpPr>
@@ -8010,7 +7978,7 @@
       </p:sp>
       <p:sp>
         <p:nvSpPr>
-          <p:cNvPr id="72612021" name="Shape 10"/>
+          <p:cNvPr id="95427818" name="Shape 10"/>
           <p:cNvSpPr/>
           <p:nvPr/>
         </p:nvSpPr>
@@ -8035,7 +8003,7 @@
       </p:sp>
       <p:sp>
         <p:nvSpPr>
-          <p:cNvPr id="1654416976" name="Text 11"/>
+          <p:cNvPr id="1711307923" name="Text 11"/>
           <p:cNvSpPr txBox="1"/>
           <p:nvPr/>
         </p:nvSpPr>
@@ -8075,7 +8043,7 @@
       </p:sp>
       <p:sp>
         <p:nvSpPr>
-          <p:cNvPr id="60426492" name="Shape 12"/>
+          <p:cNvPr id="95718114" name="Shape 12"/>
           <p:cNvSpPr/>
           <p:nvPr/>
         </p:nvSpPr>
@@ -8100,7 +8068,7 @@
       </p:sp>
       <p:sp>
         <p:nvSpPr>
-          <p:cNvPr id="1882390066" name="Text 13"/>
+          <p:cNvPr id="1715359771" name="Text 13"/>
           <p:cNvSpPr txBox="1"/>
           <p:nvPr/>
         </p:nvSpPr>
@@ -8140,7 +8108,7 @@
       </p:sp>
       <p:sp>
         <p:nvSpPr>
-          <p:cNvPr id="1280165152" name="Shape 14"/>
+          <p:cNvPr id="1597245151" name="Shape 14"/>
           <p:cNvSpPr/>
           <p:nvPr/>
         </p:nvSpPr>
@@ -8165,7 +8133,7 @@
       </p:sp>
       <p:sp>
         <p:nvSpPr>
-          <p:cNvPr id="815758000" name="Text 15"/>
+          <p:cNvPr id="1718067485" name="Text 15"/>
           <p:cNvSpPr txBox="1"/>
           <p:nvPr/>
         </p:nvSpPr>
@@ -8205,7 +8173,7 @@
       </p:sp>
       <p:sp>
         <p:nvSpPr>
-          <p:cNvPr id="627474326" name="Shape 16"/>
+          <p:cNvPr id="1181556561" name="Shape 16"/>
           <p:cNvSpPr/>
           <p:nvPr/>
         </p:nvSpPr>
@@ -8230,7 +8198,7 @@
       </p:sp>
       <p:sp>
         <p:nvSpPr>
-          <p:cNvPr id="1721879410" name="Text 17"/>
+          <p:cNvPr id="1219346026" name="Text 17"/>
           <p:cNvSpPr txBox="1"/>
           <p:nvPr/>
         </p:nvSpPr>
@@ -8270,7 +8238,7 @@
       </p:sp>
       <p:sp>
         <p:nvSpPr>
-          <p:cNvPr id="1844549019" name="Shape 18"/>
+          <p:cNvPr id="1690263650" name="Shape 18"/>
           <p:cNvSpPr/>
           <p:nvPr/>
         </p:nvSpPr>
@@ -8295,7 +8263,7 @@
       </p:sp>
       <p:sp>
         <p:nvSpPr>
-          <p:cNvPr id="2033395208" name="Text 19"/>
+          <p:cNvPr id="209308613" name="Text 19"/>
           <p:cNvSpPr txBox="1"/>
           <p:nvPr/>
         </p:nvSpPr>
@@ -8335,7 +8303,7 @@
       </p:sp>
       <p:sp>
         <p:nvSpPr>
-          <p:cNvPr id="1373929388" name="Shape 20"/>
+          <p:cNvPr id="933736826" name="Shape 20"/>
           <p:cNvSpPr/>
           <p:nvPr/>
         </p:nvSpPr>
@@ -8360,7 +8328,7 @@
       </p:sp>
       <p:sp>
         <p:nvSpPr>
-          <p:cNvPr id="1318036379" name="Text 21"/>
+          <p:cNvPr id="2104991317" name="Text 21"/>
           <p:cNvSpPr txBox="1"/>
           <p:nvPr/>
         </p:nvSpPr>
@@ -8400,7 +8368,7 @@
       </p:sp>
       <p:sp>
         <p:nvSpPr>
-          <p:cNvPr id="1226716718" name="Shape 22"/>
+          <p:cNvPr id="621246996" name="Shape 22"/>
           <p:cNvSpPr/>
           <p:nvPr/>
         </p:nvSpPr>
@@ -8425,7 +8393,7 @@
       </p:sp>
       <p:sp>
         <p:nvSpPr>
-          <p:cNvPr id="1626737790" name="Text 23"/>
+          <p:cNvPr id="1510807585" name="Text 23"/>
           <p:cNvSpPr txBox="1"/>
           <p:nvPr/>
         </p:nvSpPr>
@@ -8465,7 +8433,7 @@
       </p:sp>
       <p:sp>
         <p:nvSpPr>
-          <p:cNvPr id="287914272" name="Shape 24"/>
+          <p:cNvPr id="271179107" name="Shape 24"/>
           <p:cNvSpPr/>
           <p:nvPr/>
         </p:nvSpPr>
@@ -8490,7 +8458,7 @@
       </p:sp>
       <p:sp>
         <p:nvSpPr>
-          <p:cNvPr id="254192177" name="Text 25"/>
+          <p:cNvPr id="1739587888" name="Text 25"/>
           <p:cNvSpPr txBox="1"/>
           <p:nvPr/>
         </p:nvSpPr>
@@ -8530,7 +8498,7 @@
       </p:sp>
       <p:sp>
         <p:nvSpPr>
-          <p:cNvPr id="882580328" name="Shape 26"/>
+          <p:cNvPr id="582246660" name="Shape 26"/>
           <p:cNvSpPr/>
           <p:nvPr/>
         </p:nvSpPr>
@@ -8555,7 +8523,7 @@
       </p:sp>
       <p:sp>
         <p:nvSpPr>
-          <p:cNvPr id="319657955" name="Text 27"/>
+          <p:cNvPr id="1969911359" name="Text 27"/>
           <p:cNvSpPr txBox="1"/>
           <p:nvPr/>
         </p:nvSpPr>
@@ -8595,7 +8563,7 @@
       </p:sp>
       <p:sp>
         <p:nvSpPr>
-          <p:cNvPr id="1485578303" name="Shape 28"/>
+          <p:cNvPr id="764824095" name="Shape 28"/>
           <p:cNvSpPr/>
           <p:nvPr/>
         </p:nvSpPr>
@@ -8620,7 +8588,7 @@
       </p:sp>
       <p:sp>
         <p:nvSpPr>
-          <p:cNvPr id="1194178722" name="Text 29"/>
+          <p:cNvPr id="1244958001" name="Text 29"/>
           <p:cNvSpPr txBox="1"/>
           <p:nvPr/>
         </p:nvSpPr>
@@ -8660,7 +8628,7 @@
       </p:sp>
       <p:sp>
         <p:nvSpPr>
-          <p:cNvPr id="978540791" name="Shape 30"/>
+          <p:cNvPr id="1385069015" name="Shape 30"/>
           <p:cNvSpPr/>
           <p:nvPr/>
         </p:nvSpPr>
@@ -8685,7 +8653,7 @@
       </p:sp>
       <p:sp>
         <p:nvSpPr>
-          <p:cNvPr id="1028201985" name="Text 31"/>
+          <p:cNvPr id="283503986" name="Text 31"/>
           <p:cNvSpPr txBox="1"/>
           <p:nvPr/>
         </p:nvSpPr>
@@ -8725,7 +8693,7 @@
       </p:sp>
       <p:sp>
         <p:nvSpPr>
-          <p:cNvPr id="1602242549" name="Shape 32"/>
+          <p:cNvPr id="1184058524" name="Shape 32"/>
           <p:cNvSpPr/>
           <p:nvPr/>
         </p:nvSpPr>
@@ -8750,7 +8718,7 @@
       </p:sp>
       <p:sp>
         <p:nvSpPr>
-          <p:cNvPr id="1010129763" name="Text 33"/>
+          <p:cNvPr id="836035208" name="Text 33"/>
           <p:cNvSpPr txBox="1"/>
           <p:nvPr/>
         </p:nvSpPr>
@@ -8790,7 +8758,7 @@
       </p:sp>
       <p:sp>
         <p:nvSpPr>
-          <p:cNvPr id="355136057" name="Text 34"/>
+          <p:cNvPr id="1301889009" name="Text 34"/>
           <p:cNvSpPr txBox="1"/>
           <p:nvPr/>
         </p:nvSpPr>
@@ -8874,7 +8842,7 @@
       </p:grpSpPr>
       <p:sp>
         <p:nvSpPr>
-          <p:cNvPr id="438411483" name="Shape 0"/>
+          <p:cNvPr id="1405711486" name="Shape 0"/>
           <p:cNvSpPr/>
           <p:nvPr/>
         </p:nvSpPr>
@@ -8894,7 +8862,7 @@
       </p:sp>
       <p:sp>
         <p:nvSpPr>
-          <p:cNvPr id="275270462" name="Text 1"/>
+          <p:cNvPr id="1223373734" name="Text 1"/>
           <p:cNvSpPr txBox="1"/>
           <p:nvPr/>
         </p:nvSpPr>
@@ -8934,7 +8902,7 @@
       </p:sp>
       <p:sp>
         <p:nvSpPr>
-          <p:cNvPr id="801064478" name="Shape 2"/>
+          <p:cNvPr id="904918201" name="Shape 2"/>
           <p:cNvSpPr/>
           <p:nvPr/>
         </p:nvSpPr>
@@ -8957,7 +8925,7 @@
       </p:sp>
       <p:sp>
         <p:nvSpPr>
-          <p:cNvPr id="1867555107" name="Shape 3"/>
+          <p:cNvPr id="1748757968" name="Shape 3"/>
           <p:cNvSpPr/>
           <p:nvPr/>
         </p:nvSpPr>
@@ -8979,7 +8947,7 @@
       </p:sp>
       <p:sp>
         <p:nvSpPr>
-          <p:cNvPr id="779948502" name="Text 4"/>
+          <p:cNvPr id="253676770" name="Text 4"/>
           <p:cNvSpPr txBox="1"/>
           <p:nvPr/>
         </p:nvSpPr>
@@ -9019,7 +8987,7 @@
       </p:sp>
       <p:sp>
         <p:nvSpPr>
-          <p:cNvPr id="860267027" name="Text 5"/>
+          <p:cNvPr id="135265681" name="Text 5"/>
           <p:cNvSpPr txBox="1"/>
           <p:nvPr/>
         </p:nvSpPr>
@@ -9062,7 +9030,7 @@
       </p:sp>
       <p:sp>
         <p:nvSpPr>
-          <p:cNvPr id="1673772300" name="Shape 6"/>
+          <p:cNvPr id="766007887" name="Shape 6"/>
           <p:cNvSpPr/>
           <p:nvPr/>
         </p:nvSpPr>
@@ -9084,7 +9052,7 @@
       </p:sp>
       <p:sp>
         <p:nvSpPr>
-          <p:cNvPr id="1476415970" name="Text 7"/>
+          <p:cNvPr id="1888233211" name="Text 7"/>
           <p:cNvSpPr txBox="1"/>
           <p:nvPr/>
         </p:nvSpPr>
@@ -9124,7 +9092,7 @@
       </p:sp>
       <p:sp>
         <p:nvSpPr>
-          <p:cNvPr id="1996619467" name="Text 8"/>
+          <p:cNvPr id="2119918663" name="Text 8"/>
           <p:cNvSpPr txBox="1"/>
           <p:nvPr/>
         </p:nvSpPr>
@@ -9167,7 +9135,7 @@
       </p:sp>
       <p:sp>
         <p:nvSpPr>
-          <p:cNvPr id="98524956" name="Shape 9"/>
+          <p:cNvPr id="694253901" name="Shape 9"/>
           <p:cNvSpPr/>
           <p:nvPr/>
         </p:nvSpPr>
@@ -9189,7 +9157,7 @@
       </p:sp>
       <p:sp>
         <p:nvSpPr>
-          <p:cNvPr id="234424679" name="Text 10"/>
+          <p:cNvPr id="1024630737" name="Text 10"/>
           <p:cNvSpPr txBox="1"/>
           <p:nvPr/>
         </p:nvSpPr>
@@ -9229,7 +9197,7 @@
       </p:sp>
       <p:sp>
         <p:nvSpPr>
-          <p:cNvPr id="717836799" name="Text 11"/>
+          <p:cNvPr id="1788120598" name="Text 11"/>
           <p:cNvSpPr txBox="1"/>
           <p:nvPr/>
         </p:nvSpPr>
@@ -9272,7 +9240,7 @@
       </p:sp>
       <p:sp>
         <p:nvSpPr>
-          <p:cNvPr id="175157656" name="Shape 12"/>
+          <p:cNvPr id="1896181261" name="Shape 12"/>
           <p:cNvSpPr/>
           <p:nvPr/>
         </p:nvSpPr>
@@ -9294,7 +9262,7 @@
       </p:sp>
       <p:sp>
         <p:nvSpPr>
-          <p:cNvPr id="1275268592" name="Text 13"/>
+          <p:cNvPr id="1670904422" name="Text 13"/>
           <p:cNvSpPr txBox="1"/>
           <p:nvPr/>
         </p:nvSpPr>
@@ -9334,7 +9302,7 @@
       </p:sp>
       <p:sp>
         <p:nvSpPr>
-          <p:cNvPr id="1838836646" name="Text 14"/>
+          <p:cNvPr id="2058532287" name="Text 14"/>
           <p:cNvSpPr txBox="1"/>
           <p:nvPr/>
         </p:nvSpPr>
@@ -9377,7 +9345,7 @@
       </p:sp>
       <p:sp>
         <p:nvSpPr>
-          <p:cNvPr id="1366917794" name="Text 15"/>
+          <p:cNvPr id="1229663415" name="Text 15"/>
           <p:cNvSpPr txBox="1"/>
           <p:nvPr/>
         </p:nvSpPr>
